--- a/Presentations/Week_10_Presentation.pptx
+++ b/Presentations/Week_10_Presentation.pptx
@@ -24,8 +24,8 @@
     <p:sldId id="362" r:id="rId15"/>
     <p:sldId id="372" r:id="rId16"/>
     <p:sldId id="373" r:id="rId17"/>
-    <p:sldId id="365" r:id="rId18"/>
-    <p:sldId id="368" r:id="rId19"/>
+    <p:sldId id="374" r:id="rId18"/>
+    <p:sldId id="365" r:id="rId19"/>
     <p:sldId id="331" r:id="rId20"/>
     <p:sldId id="330" r:id="rId21"/>
     <p:sldId id="318" r:id="rId22"/>
@@ -8170,7 +8170,7 @@
           <p:cNvPr id="2" name="Title 1">
             <a:extLst>
               <a:ext uri="{FF2B5EF4-FFF2-40B4-BE49-F238E27FC236}">
-                <a16:creationId xmlns:a16="http://schemas.microsoft.com/office/drawing/2014/main" id="{0D3760E7-D27A-1C0A-6CD5-364C193F6758}"/>
+                <a16:creationId xmlns:a16="http://schemas.microsoft.com/office/drawing/2014/main" id="{C667952B-DB24-BDD9-7748-20F9423AB764}"/>
               </a:ext>
             </a:extLst>
           </p:cNvPr>
@@ -8181,90 +8181,58 @@
             <p:ph type="title"/>
           </p:nvPr>
         </p:nvSpPr>
-        <p:spPr/>
+        <p:spPr>
+          <a:xfrm>
+            <a:off x="0" y="79386"/>
+            <a:ext cx="10479024" cy="557784"/>
+          </a:xfrm>
+        </p:spPr>
         <p:txBody>
           <a:bodyPr/>
           <a:lstStyle/>
           <a:p>
             <a:r>
               <a:rPr lang="en-US" dirty="0"/>
-              <a:t>Budget</a:t>
+              <a:t>Programming interface for the ADC</a:t>
             </a:r>
           </a:p>
         </p:txBody>
       </p:sp>
-      <p:sp>
-        <p:nvSpPr>
-          <p:cNvPr id="3" name="Content Placeholder 2">
-            <a:extLst>
-              <a:ext uri="{FF2B5EF4-FFF2-40B4-BE49-F238E27FC236}">
-                <a16:creationId xmlns:a16="http://schemas.microsoft.com/office/drawing/2014/main" id="{C699354B-C796-1926-1CEE-088B8D9B86D2}"/>
-              </a:ext>
-            </a:extLst>
-          </p:cNvPr>
-          <p:cNvSpPr>
-            <a:spLocks noGrp="1"/>
-          </p:cNvSpPr>
+      <p:pic>
+        <p:nvPicPr>
+          <p:cNvPr id="6" name="Content Placeholder 5" descr="A screenshot of a computer&#10;&#10;AI-generated content may be incorrect.">
+            <a:extLst>
+              <a:ext uri="{FF2B5EF4-FFF2-40B4-BE49-F238E27FC236}">
+                <a16:creationId xmlns:a16="http://schemas.microsoft.com/office/drawing/2014/main" id="{62D04729-9A3C-FA02-EEC9-97CC09B2041C}"/>
+              </a:ext>
+            </a:extLst>
+          </p:cNvPr>
+          <p:cNvPicPr>
+            <a:picLocks noGrp="1" noChangeAspect="1"/>
+          </p:cNvPicPr>
           <p:nvPr>
             <p:ph sz="quarter" idx="13"/>
           </p:nvPr>
-        </p:nvSpPr>
-        <p:spPr/>
-        <p:txBody>
-          <a:bodyPr/>
-          <a:lstStyle/>
-          <a:p>
-            <a:pPr marL="0" indent="0">
-              <a:buNone/>
-            </a:pPr>
-            <a:r>
-              <a:rPr lang="en-US" dirty="0"/>
-              <a:t>Current Expenses :</a:t>
-            </a:r>
-          </a:p>
-          <a:p>
-            <a:r>
-              <a:rPr lang="en-US" dirty="0"/>
-              <a:t>DDS Test Board: $33</a:t>
-            </a:r>
-          </a:p>
-          <a:p>
-            <a:r>
-              <a:rPr lang="en-US" dirty="0"/>
-              <a:t>Component Order: $140</a:t>
-            </a:r>
-          </a:p>
-          <a:p>
-            <a:r>
-              <a:rPr lang="en-US" dirty="0"/>
-              <a:t>Battery Order: $44</a:t>
-            </a:r>
-          </a:p>
-          <a:p>
-            <a:endParaRPr lang="en-US" dirty="0"/>
-          </a:p>
-          <a:p>
-            <a:pPr marL="0" indent="0">
-              <a:buNone/>
-            </a:pPr>
-            <a:r>
-              <a:rPr lang="en-US" dirty="0"/>
-              <a:t>Total</a:t>
-            </a:r>
-            <a:r>
-              <a:rPr lang="en-US"/>
-              <a:t>: $217</a:t>
-            </a:r>
-            <a:endParaRPr lang="en-US" dirty="0"/>
-          </a:p>
-        </p:txBody>
-      </p:sp>
+        </p:nvPicPr>
+        <p:blipFill>
+          <a:blip r:embed="rId2"/>
+          <a:stretch>
+            <a:fillRect/>
+          </a:stretch>
+        </p:blipFill>
+        <p:spPr>
+          <a:xfrm>
+            <a:off x="4093086" y="4410849"/>
+            <a:ext cx="2636897" cy="2367311"/>
+          </a:xfrm>
+        </p:spPr>
+      </p:pic>
       <p:sp>
         <p:nvSpPr>
           <p:cNvPr id="4" name="Slide Number Placeholder 3">
             <a:extLst>
               <a:ext uri="{FF2B5EF4-FFF2-40B4-BE49-F238E27FC236}">
-                <a16:creationId xmlns:a16="http://schemas.microsoft.com/office/drawing/2014/main" id="{53EC9821-24B7-EE51-078D-0B7963AC20BB}"/>
+                <a16:creationId xmlns:a16="http://schemas.microsoft.com/office/drawing/2014/main" id="{A24F2621-5064-54E3-00E0-804CA2FA9955}"/>
               </a:ext>
             </a:extLst>
           </p:cNvPr>
@@ -8289,10 +8257,100 @@
           </a:p>
         </p:txBody>
       </p:sp>
+      <p:pic>
+        <p:nvPicPr>
+          <p:cNvPr id="8" name="Picture 7" descr="A screenshot of a computer program&#10;&#10;AI-generated content may be incorrect.">
+            <a:extLst>
+              <a:ext uri="{FF2B5EF4-FFF2-40B4-BE49-F238E27FC236}">
+                <a16:creationId xmlns:a16="http://schemas.microsoft.com/office/drawing/2014/main" id="{FCEBC9AB-2969-CB51-B53E-5984AF0E8BDF}"/>
+              </a:ext>
+            </a:extLst>
+          </p:cNvPr>
+          <p:cNvPicPr>
+            <a:picLocks noChangeAspect="1"/>
+          </p:cNvPicPr>
+          <p:nvPr/>
+        </p:nvPicPr>
+        <p:blipFill>
+          <a:blip r:embed="rId3"/>
+          <a:stretch>
+            <a:fillRect/>
+          </a:stretch>
+        </p:blipFill>
+        <p:spPr>
+          <a:xfrm>
+            <a:off x="3940794" y="506902"/>
+            <a:ext cx="4136138" cy="3880497"/>
+          </a:xfrm>
+          <a:prstGeom prst="rect">
+            <a:avLst/>
+          </a:prstGeom>
+        </p:spPr>
+      </p:pic>
+      <p:pic>
+        <p:nvPicPr>
+          <p:cNvPr id="10" name="Picture 9" descr="A screenshot of a computer program&#10;&#10;AI-generated content may be incorrect.">
+            <a:extLst>
+              <a:ext uri="{FF2B5EF4-FFF2-40B4-BE49-F238E27FC236}">
+                <a16:creationId xmlns:a16="http://schemas.microsoft.com/office/drawing/2014/main" id="{46200DAF-5339-9C51-E4D4-F73C485A83A3}"/>
+              </a:ext>
+            </a:extLst>
+          </p:cNvPr>
+          <p:cNvPicPr>
+            <a:picLocks noChangeAspect="1"/>
+          </p:cNvPicPr>
+          <p:nvPr/>
+        </p:nvPicPr>
+        <p:blipFill>
+          <a:blip r:embed="rId4"/>
+          <a:stretch>
+            <a:fillRect/>
+          </a:stretch>
+        </p:blipFill>
+        <p:spPr>
+          <a:xfrm>
+            <a:off x="21443" y="530352"/>
+            <a:ext cx="3897908" cy="4479925"/>
+          </a:xfrm>
+          <a:prstGeom prst="rect">
+            <a:avLst/>
+          </a:prstGeom>
+        </p:spPr>
+      </p:pic>
+      <p:pic>
+        <p:nvPicPr>
+          <p:cNvPr id="12" name="Picture 11" descr="A screenshot of a computer program&#10;&#10;AI-generated content may be incorrect.">
+            <a:extLst>
+              <a:ext uri="{FF2B5EF4-FFF2-40B4-BE49-F238E27FC236}">
+                <a16:creationId xmlns:a16="http://schemas.microsoft.com/office/drawing/2014/main" id="{B207E472-4696-3CAD-D10C-38AA0DE8A53F}"/>
+              </a:ext>
+            </a:extLst>
+          </p:cNvPr>
+          <p:cNvPicPr>
+            <a:picLocks noChangeAspect="1"/>
+          </p:cNvPicPr>
+          <p:nvPr/>
+        </p:nvPicPr>
+        <p:blipFill>
+          <a:blip r:embed="rId5"/>
+          <a:stretch>
+            <a:fillRect/>
+          </a:stretch>
+        </p:blipFill>
+        <p:spPr>
+          <a:xfrm>
+            <a:off x="7594769" y="530352"/>
+            <a:ext cx="4423495" cy="5379582"/>
+          </a:xfrm>
+          <a:prstGeom prst="rect">
+            <a:avLst/>
+          </a:prstGeom>
+        </p:spPr>
+      </p:pic>
     </p:spTree>
     <p:extLst>
       <p:ext uri="{BB962C8B-B14F-4D97-AF65-F5344CB8AC3E}">
-        <p14:creationId xmlns:p14="http://schemas.microsoft.com/office/powerpoint/2010/main" val="2571095337"/>
+        <p14:creationId xmlns:p14="http://schemas.microsoft.com/office/powerpoint/2010/main" val="7883541"/>
       </p:ext>
     </p:extLst>
   </p:cSld>
@@ -8324,7 +8382,7 @@
           <p:cNvPr id="2" name="Title 1">
             <a:extLst>
               <a:ext uri="{FF2B5EF4-FFF2-40B4-BE49-F238E27FC236}">
-                <a16:creationId xmlns:a16="http://schemas.microsoft.com/office/drawing/2014/main" id="{2B48C769-9D59-F201-C33F-7A9E3BF26CCA}"/>
+                <a16:creationId xmlns:a16="http://schemas.microsoft.com/office/drawing/2014/main" id="{0D3760E7-D27A-1C0A-6CD5-364C193F6758}"/>
               </a:ext>
             </a:extLst>
           </p:cNvPr>
@@ -8342,49 +8400,83 @@
           <a:p>
             <a:r>
               <a:rPr lang="en-US" dirty="0"/>
-              <a:t>Updated BOM</a:t>
+              <a:t>Budget</a:t>
             </a:r>
           </a:p>
         </p:txBody>
       </p:sp>
-      <p:pic>
-        <p:nvPicPr>
-          <p:cNvPr id="6" name="Content Placeholder 5">
-            <a:extLst>
-              <a:ext uri="{FF2B5EF4-FFF2-40B4-BE49-F238E27FC236}">
-                <a16:creationId xmlns:a16="http://schemas.microsoft.com/office/drawing/2014/main" id="{8F2340C0-0ECF-4FC4-DDB5-496D8F3A6DA0}"/>
-              </a:ext>
-            </a:extLst>
-          </p:cNvPr>
-          <p:cNvPicPr>
-            <a:picLocks noGrp="1" noChangeAspect="1"/>
-          </p:cNvPicPr>
+      <p:sp>
+        <p:nvSpPr>
+          <p:cNvPr id="3" name="Content Placeholder 2">
+            <a:extLst>
+              <a:ext uri="{FF2B5EF4-FFF2-40B4-BE49-F238E27FC236}">
+                <a16:creationId xmlns:a16="http://schemas.microsoft.com/office/drawing/2014/main" id="{C699354B-C796-1926-1CEE-088B8D9B86D2}"/>
+              </a:ext>
+            </a:extLst>
+          </p:cNvPr>
+          <p:cNvSpPr>
+            <a:spLocks noGrp="1"/>
+          </p:cNvSpPr>
           <p:nvPr>
             <p:ph sz="quarter" idx="13"/>
           </p:nvPr>
-        </p:nvPicPr>
-        <p:blipFill>
-          <a:blip r:embed="rId2"/>
-          <a:stretch>
-            <a:fillRect/>
-          </a:stretch>
-        </p:blipFill>
-        <p:spPr>
-          <a:xfrm>
-            <a:off x="998853" y="1805566"/>
-            <a:ext cx="10194294" cy="4211186"/>
-          </a:xfrm>
-          <a:prstGeom prst="rect">
-            <a:avLst/>
-          </a:prstGeom>
-        </p:spPr>
-      </p:pic>
+        </p:nvSpPr>
+        <p:spPr/>
+        <p:txBody>
+          <a:bodyPr/>
+          <a:lstStyle/>
+          <a:p>
+            <a:pPr marL="0" indent="0">
+              <a:buNone/>
+            </a:pPr>
+            <a:r>
+              <a:rPr lang="en-US" dirty="0"/>
+              <a:t>Current Expenses :</a:t>
+            </a:r>
+          </a:p>
+          <a:p>
+            <a:r>
+              <a:rPr lang="en-US" dirty="0"/>
+              <a:t>DDS Test Board: $33</a:t>
+            </a:r>
+          </a:p>
+          <a:p>
+            <a:r>
+              <a:rPr lang="en-US" dirty="0"/>
+              <a:t>Component Order: $140</a:t>
+            </a:r>
+          </a:p>
+          <a:p>
+            <a:r>
+              <a:rPr lang="en-US" dirty="0"/>
+              <a:t>Battery Order: $44</a:t>
+            </a:r>
+          </a:p>
+          <a:p>
+            <a:endParaRPr lang="en-US" dirty="0"/>
+          </a:p>
+          <a:p>
+            <a:pPr marL="0" indent="0">
+              <a:buNone/>
+            </a:pPr>
+            <a:r>
+              <a:rPr lang="en-US" dirty="0"/>
+              <a:t>Total</a:t>
+            </a:r>
+            <a:r>
+              <a:rPr lang="en-US"/>
+              <a:t>: $217</a:t>
+            </a:r>
+            <a:endParaRPr lang="en-US" dirty="0"/>
+          </a:p>
+        </p:txBody>
+      </p:sp>
       <p:sp>
         <p:nvSpPr>
           <p:cNvPr id="4" name="Slide Number Placeholder 3">
             <a:extLst>
               <a:ext uri="{FF2B5EF4-FFF2-40B4-BE49-F238E27FC236}">
-                <a16:creationId xmlns:a16="http://schemas.microsoft.com/office/drawing/2014/main" id="{C80C4333-0EC0-91D6-15EF-53B3BFFE2CD6}"/>
+                <a16:creationId xmlns:a16="http://schemas.microsoft.com/office/drawing/2014/main" id="{53EC9821-24B7-EE51-078D-0B7963AC20BB}"/>
               </a:ext>
             </a:extLst>
           </p:cNvPr>
@@ -8412,7 +8504,7 @@
     </p:spTree>
     <p:extLst>
       <p:ext uri="{BB962C8B-B14F-4D97-AF65-F5344CB8AC3E}">
-        <p14:creationId xmlns:p14="http://schemas.microsoft.com/office/powerpoint/2010/main" val="2589508653"/>
+        <p14:creationId xmlns:p14="http://schemas.microsoft.com/office/powerpoint/2010/main" val="2571095337"/>
       </p:ext>
     </p:extLst>
   </p:cSld>
@@ -10690,6 +10782,15 @@
 </file>
 
 <file path=customXml/item1.xml><?xml version="1.0" encoding="utf-8"?>
+<?mso-contentType ?>
+<FormTemplates xmlns="http://schemas.microsoft.com/sharepoint/v3/contenttype/forms">
+  <Display>DocumentLibraryForm</Display>
+  <Edit>DocumentLibraryForm</Edit>
+  <New>DocumentLibraryForm</New>
+</FormTemplates>
+</file>
+
+<file path=customXml/item2.xml><?xml version="1.0" encoding="utf-8"?>
 <ct:contentTypeSchema xmlns:ct="http://schemas.microsoft.com/office/2006/metadata/contentType" xmlns:ma="http://schemas.microsoft.com/office/2006/metadata/properties/metaAttributes" ct:_="" ma:_="" ma:contentTypeName="Document" ma:contentTypeID="0x01010079F111ED35F8CC479449609E8A0923A6" ma:contentTypeVersion="29" ma:contentTypeDescription="Create a new document." ma:contentTypeScope="" ma:versionID="6a914531ae0f23be31da2eba1f3b42a9">
   <xsd:schema xmlns:xsd="http://www.w3.org/2001/XMLSchema" xmlns:xs="http://www.w3.org/2001/XMLSchema" xmlns:p="http://schemas.microsoft.com/office/2006/metadata/properties" xmlns:ns1="http://schemas.microsoft.com/sharepoint/v3" xmlns:ns2="71af3243-3dd4-4a8d-8c0d-dd76da1f02a5" xmlns:ns3="16c05727-aa75-4e4a-9b5f-8a80a1165891" xmlns:ns4="230e9df3-be65-4c73-a93b-d1236ebd677e" targetNamespace="http://schemas.microsoft.com/office/2006/metadata/properties" ma:root="true" ma:fieldsID="ae00154c9e66547f022c4923f88826d6" ns1:_="" ns2:_="" ns3:_="" ns4:_="">
     <xsd:import namespace="http://schemas.microsoft.com/sharepoint/v3"/>
@@ -11001,15 +11102,6 @@
 </ct:contentTypeSchema>
 </file>
 
-<file path=customXml/item2.xml><?xml version="1.0" encoding="utf-8"?>
-<?mso-contentType ?>
-<FormTemplates xmlns="http://schemas.microsoft.com/sharepoint/v3/contenttype/forms">
-  <Display>DocumentLibraryForm</Display>
-  <Edit>DocumentLibraryForm</Edit>
-  <New>DocumentLibraryForm</New>
-</FormTemplates>
-</file>
-
 <file path=customXml/item3.xml><?xml version="1.0" encoding="utf-8"?>
 <p:properties xmlns:p="http://schemas.microsoft.com/office/2006/metadata/properties" xmlns:xsi="http://www.w3.org/2001/XMLSchema-instance" xmlns:pc="http://schemas.microsoft.com/office/infopath/2007/PartnerControls">
   <documentManagement>
@@ -11031,6 +11123,14 @@
 </file>
 
 <file path=customXml/itemProps1.xml><?xml version="1.0" encoding="utf-8"?>
+<ds:datastoreItem xmlns:ds="http://schemas.openxmlformats.org/officeDocument/2006/customXml" ds:itemID="{55E72E99-0076-433E-AD3A-575A11FAB73D}">
+  <ds:schemaRefs>
+    <ds:schemaRef ds:uri="http://schemas.microsoft.com/sharepoint/v3/contenttype/forms"/>
+  </ds:schemaRefs>
+</ds:datastoreItem>
+</file>
+
+<file path=customXml/itemProps2.xml><?xml version="1.0" encoding="utf-8"?>
 <ds:datastoreItem xmlns:ds="http://schemas.openxmlformats.org/officeDocument/2006/customXml" ds:itemID="{A8837B91-4329-4308-94DA-BB811B5F3092}">
   <ds:schemaRefs>
     <ds:schemaRef ds:uri="http://schemas.microsoft.com/office/2006/metadata/contentType"/>
@@ -11051,14 +11151,6 @@
 </ds:datastoreItem>
 </file>
 
-<file path=customXml/itemProps2.xml><?xml version="1.0" encoding="utf-8"?>
-<ds:datastoreItem xmlns:ds="http://schemas.openxmlformats.org/officeDocument/2006/customXml" ds:itemID="{55E72E99-0076-433E-AD3A-575A11FAB73D}">
-  <ds:schemaRefs>
-    <ds:schemaRef ds:uri="http://schemas.microsoft.com/sharepoint/v3/contenttype/forms"/>
-  </ds:schemaRefs>
-</ds:datastoreItem>
-</file>
-
 <file path=customXml/itemProps3.xml><?xml version="1.0" encoding="utf-8"?>
 <ds:datastoreItem xmlns:ds="http://schemas.openxmlformats.org/officeDocument/2006/customXml" ds:itemID="{7B247F30-5811-40C0-99EC-CF53200590BE}">
   <ds:schemaRefs>
